--- a/assets/first_phase_presentation.pptx
+++ b/assets/first_phase_presentation.pptx
@@ -135,7 +135,7 @@
 <file path=ppt/revisionInfo.xml><?xml version="1.0" encoding="utf-8"?>
 <p1510:revInfo xmlns:a="http://schemas.openxmlformats.org/drawingml/2006/main" xmlns:r="http://schemas.openxmlformats.org/officeDocument/2006/relationships" xmlns:p1510="http://schemas.microsoft.com/office/powerpoint/2015/10/main">
   <p1510:revLst>
-    <p1510:client id="{FDF523CB-9D4C-4B4D-BC52-9662FA11B56C}" v="56" dt="2026-07-07T13:42:09.174"/>
+    <p1510:client id="{FDF523CB-9D4C-4B4D-BC52-9662FA11B56C}" v="62" dt="2026-07-08T14:34:48.182"/>
   </p1510:revLst>
 </p1510:revInfo>
 </file>
@@ -145,7 +145,7 @@
   <pc:docChgLst>
     <pc:chgData name="Rohith Reddy" userId="15327854129f0578" providerId="LiveId" clId="{B0A560F6-E562-44DD-8F63-550E6F99639B}"/>
     <pc:docChg chg="undo custSel addSld modSld sldOrd">
-      <pc:chgData name="Rohith Reddy" userId="15327854129f0578" providerId="LiveId" clId="{B0A560F6-E562-44DD-8F63-550E6F99639B}" dt="2026-07-07T13:42:09.174" v="328" actId="12269"/>
+      <pc:chgData name="Rohith Reddy" userId="15327854129f0578" providerId="LiveId" clId="{B0A560F6-E562-44DD-8F63-550E6F99639B}" dt="2026-07-08T14:35:09.067" v="385" actId="20577"/>
       <pc:docMkLst>
         <pc:docMk/>
       </pc:docMkLst>
@@ -283,7 +283,7 @@
         </pc:graphicFrameChg>
       </pc:sldChg>
       <pc:sldChg chg="addSp delSp modSp mod">
-        <pc:chgData name="Rohith Reddy" userId="15327854129f0578" providerId="LiveId" clId="{B0A560F6-E562-44DD-8F63-550E6F99639B}" dt="2026-07-07T13:39:41.492" v="309" actId="20577"/>
+        <pc:chgData name="Rohith Reddy" userId="15327854129f0578" providerId="LiveId" clId="{B0A560F6-E562-44DD-8F63-550E6F99639B}" dt="2026-07-08T14:35:09.067" v="385" actId="20577"/>
         <pc:sldMkLst>
           <pc:docMk/>
           <pc:sldMk cId="0" sldId="259"/>
@@ -321,7 +321,7 @@
           </ac:spMkLst>
         </pc:spChg>
         <pc:graphicFrameChg chg="add mod modGraphic">
-          <ac:chgData name="Rohith Reddy" userId="15327854129f0578" providerId="LiveId" clId="{B0A560F6-E562-44DD-8F63-550E6F99639B}" dt="2026-07-07T13:22:32.591" v="225" actId="26606"/>
+          <ac:chgData name="Rohith Reddy" userId="15327854129f0578" providerId="LiveId" clId="{B0A560F6-E562-44DD-8F63-550E6F99639B}" dt="2026-07-08T14:35:09.067" v="385" actId="20577"/>
           <ac:graphicFrameMkLst>
             <pc:docMk/>
             <pc:sldMk cId="0" sldId="259"/>
@@ -8484,19 +8484,43 @@
         <a:bodyPr/>
         <a:lstStyle/>
         <a:p>
-          <a:pPr>
+          <a:pPr algn="ctr">
             <a:lnSpc>
               <a:spcPct val="100000"/>
             </a:lnSpc>
           </a:pPr>
           <a:r>
-            <a:rPr lang="en-IN" b="1"/>
+            <a:rPr lang="en-IN" b="1" dirty="0"/>
             <a:t>Missing Value Protocol: </a:t>
           </a:r>
           <a:r>
-            <a:rPr lang="en-IN"/>
+            <a:rPr lang="en-IN" dirty="0"/>
             <a:t>Incomplete observations or coordinate lookup failures were handled by removing rows entirely to protect feature space.</a:t>
           </a:r>
+        </a:p>
+        <a:p>
+          <a:pPr algn="l">
+            <a:lnSpc>
+              <a:spcPct val="100000"/>
+            </a:lnSpc>
+          </a:pPr>
+          <a:r>
+            <a:rPr lang="en-IN" b="1" dirty="0"/>
+            <a:t>    What We Dropped:</a:t>
+          </a:r>
+          <a:r>
+            <a:rPr lang="en-IN" dirty="0"/>
+            <a:t> </a:t>
+          </a:r>
+          <a:r>
+            <a:rPr lang="en-IN" b="0" i="0" dirty="0" err="1"/>
+            <a:t>match_id</a:t>
+          </a:r>
+          <a:r>
+            <a:rPr lang="en-IN" b="0" i="0" dirty="0"/>
+            <a:t> , venue , city , team </a:t>
+          </a:r>
+          <a:endParaRPr lang="en-IN" dirty="0"/>
         </a:p>
       </dgm:t>
     </dgm:pt>
@@ -12684,7 +12708,7 @@
       </dsp:nvSpPr>
       <dsp:spPr>
         <a:xfrm>
-          <a:off x="908414" y="922684"/>
+          <a:off x="908414" y="909376"/>
           <a:ext cx="1442103" cy="1442103"/>
         </a:xfrm>
         <a:prstGeom prst="rect">
@@ -12749,8 +12773,8 @@
       </dsp:nvSpPr>
       <dsp:spPr>
         <a:xfrm>
-          <a:off x="27129" y="2746435"/>
-          <a:ext cx="3204675" cy="720000"/>
+          <a:off x="27129" y="2737243"/>
+          <a:ext cx="3204675" cy="742500"/>
         </a:xfrm>
         <a:prstGeom prst="rect">
           <a:avLst/>
@@ -12792,18 +12816,49 @@
             <a:buNone/>
           </a:pPr>
           <a:r>
-            <a:rPr lang="en-IN" sz="1100" b="1" kern="1200"/>
+            <a:rPr lang="en-IN" sz="1100" b="1" kern="1200" dirty="0"/>
             <a:t>Missing Value Protocol: </a:t>
           </a:r>
           <a:r>
-            <a:rPr lang="en-IN" sz="1100" kern="1200"/>
+            <a:rPr lang="en-IN" sz="1100" kern="1200" dirty="0"/>
             <a:t>Incomplete observations or coordinate lookup failures were handled by removing rows entirely to protect feature space.</a:t>
           </a:r>
         </a:p>
+        <a:p>
+          <a:pPr marL="0" lvl="0" indent="0" algn="l" defTabSz="488950">
+            <a:lnSpc>
+              <a:spcPct val="100000"/>
+            </a:lnSpc>
+            <a:spcBef>
+              <a:spcPct val="0"/>
+            </a:spcBef>
+            <a:spcAft>
+              <a:spcPct val="35000"/>
+            </a:spcAft>
+            <a:buNone/>
+          </a:pPr>
+          <a:r>
+            <a:rPr lang="en-IN" sz="1100" b="1" kern="1200" dirty="0"/>
+            <a:t>    What We Dropped:</a:t>
+          </a:r>
+          <a:r>
+            <a:rPr lang="en-IN" sz="1100" kern="1200" dirty="0"/>
+            <a:t> </a:t>
+          </a:r>
+          <a:r>
+            <a:rPr lang="en-IN" sz="1100" b="0" i="0" kern="1200" dirty="0" err="1"/>
+            <a:t>match_id</a:t>
+          </a:r>
+          <a:r>
+            <a:rPr lang="en-IN" sz="1100" b="0" i="0" kern="1200" dirty="0"/>
+            <a:t> , venue , city , team </a:t>
+          </a:r>
+          <a:endParaRPr lang="en-IN" sz="1100" kern="1200" dirty="0"/>
+        </a:p>
       </dsp:txBody>
       <dsp:txXfrm>
-        <a:off x="27129" y="2746435"/>
-        <a:ext cx="3204675" cy="720000"/>
+        <a:off x="27129" y="2737243"/>
+        <a:ext cx="3204675" cy="742500"/>
       </dsp:txXfrm>
     </dsp:sp>
     <dsp:sp modelId="{FB624EA2-4995-4A96-9B7E-113018478B95}">
@@ -12813,7 +12868,7 @@
       </dsp:nvSpPr>
       <dsp:spPr>
         <a:xfrm>
-          <a:off x="4673908" y="922684"/>
+          <a:off x="4673908" y="909376"/>
           <a:ext cx="1442103" cy="1442103"/>
         </a:xfrm>
         <a:prstGeom prst="rect">
@@ -12878,8 +12933,8 @@
       </dsp:nvSpPr>
       <dsp:spPr>
         <a:xfrm>
-          <a:off x="3792622" y="2746435"/>
-          <a:ext cx="3204675" cy="720000"/>
+          <a:off x="3792622" y="2737243"/>
+          <a:ext cx="3204675" cy="742500"/>
         </a:xfrm>
         <a:prstGeom prst="rect">
           <a:avLst/>
@@ -12931,8 +12986,8 @@
         </a:p>
       </dsp:txBody>
       <dsp:txXfrm>
-        <a:off x="3792622" y="2746435"/>
-        <a:ext cx="3204675" cy="720000"/>
+        <a:off x="3792622" y="2737243"/>
+        <a:ext cx="3204675" cy="742500"/>
       </dsp:txXfrm>
     </dsp:sp>
     <dsp:sp modelId="{CB4FC2F7-7A81-493E-9698-3B3834434CF5}">
@@ -12942,7 +12997,7 @@
       </dsp:nvSpPr>
       <dsp:spPr>
         <a:xfrm>
-          <a:off x="8439401" y="922684"/>
+          <a:off x="8439401" y="909376"/>
           <a:ext cx="1442103" cy="1442103"/>
         </a:xfrm>
         <a:prstGeom prst="rect">
@@ -13007,8 +13062,8 @@
       </dsp:nvSpPr>
       <dsp:spPr>
         <a:xfrm>
-          <a:off x="7558115" y="2746435"/>
-          <a:ext cx="3204675" cy="720000"/>
+          <a:off x="7558115" y="2737243"/>
+          <a:ext cx="3204675" cy="742500"/>
         </a:xfrm>
         <a:prstGeom prst="rect">
           <a:avLst/>
@@ -13060,8 +13115,8 @@
         </a:p>
       </dsp:txBody>
       <dsp:txXfrm>
-        <a:off x="7558115" y="2746435"/>
-        <a:ext cx="3204675" cy="720000"/>
+        <a:off x="7558115" y="2737243"/>
+        <a:ext cx="3204675" cy="742500"/>
       </dsp:txXfrm>
     </dsp:sp>
   </dsp:spTree>
@@ -24662,7 +24717,7 @@
           <a:p>
             <a:fld id="{5BCAD085-E8A6-8845-BD4E-CB4CCA059FC4}" type="datetimeFigureOut">
               <a:rPr lang="en-US" smtClean="0"/>
-              <a:t>7/7/2026</a:t>
+              <a:t>7/15/2026</a:t>
             </a:fld>
             <a:endParaRPr lang="en-US"/>
           </a:p>
@@ -24870,7 +24925,7 @@
           <a:p>
             <a:fld id="{5BCAD085-E8A6-8845-BD4E-CB4CCA059FC4}" type="datetimeFigureOut">
               <a:rPr lang="en-US" smtClean="0"/>
-              <a:t>7/7/2026</a:t>
+              <a:t>7/15/2026</a:t>
             </a:fld>
             <a:endParaRPr lang="en-US"/>
           </a:p>
@@ -25126,7 +25181,7 @@
           <a:p>
             <a:fld id="{5BCAD085-E8A6-8845-BD4E-CB4CCA059FC4}" type="datetimeFigureOut">
               <a:rPr lang="en-US" smtClean="0"/>
-              <a:t>7/7/2026</a:t>
+              <a:t>7/15/2026</a:t>
             </a:fld>
             <a:endParaRPr lang="en-US"/>
           </a:p>
@@ -25300,7 +25355,7 @@
           <a:p>
             <a:fld id="{5BCAD085-E8A6-8845-BD4E-CB4CCA059FC4}" type="datetimeFigureOut">
               <a:rPr lang="en-US" smtClean="0"/>
-              <a:t>7/7/2026</a:t>
+              <a:t>7/15/2026</a:t>
             </a:fld>
             <a:endParaRPr lang="en-US"/>
           </a:p>
@@ -25643,7 +25698,7 @@
           <a:p>
             <a:fld id="{5BCAD085-E8A6-8845-BD4E-CB4CCA059FC4}" type="datetimeFigureOut">
               <a:rPr lang="en-US" smtClean="0"/>
-              <a:t>7/7/2026</a:t>
+              <a:t>7/15/2026</a:t>
             </a:fld>
             <a:endParaRPr lang="en-US"/>
           </a:p>
@@ -25918,7 +25973,7 @@
           <a:p>
             <a:fld id="{5BCAD085-E8A6-8845-BD4E-CB4CCA059FC4}" type="datetimeFigureOut">
               <a:rPr lang="en-US" smtClean="0"/>
-              <a:t>7/7/2026</a:t>
+              <a:t>7/15/2026</a:t>
             </a:fld>
             <a:endParaRPr lang="en-US"/>
           </a:p>
@@ -26297,7 +26352,7 @@
           <a:p>
             <a:fld id="{5BCAD085-E8A6-8845-BD4E-CB4CCA059FC4}" type="datetimeFigureOut">
               <a:rPr lang="en-US" smtClean="0"/>
-              <a:t>7/7/2026</a:t>
+              <a:t>7/15/2026</a:t>
             </a:fld>
             <a:endParaRPr lang="en-US"/>
           </a:p>
@@ -26415,7 +26470,7 @@
           <a:p>
             <a:fld id="{5BCAD085-E8A6-8845-BD4E-CB4CCA059FC4}" type="datetimeFigureOut">
               <a:rPr lang="en-US" smtClean="0"/>
-              <a:t>7/7/2026</a:t>
+              <a:t>7/15/2026</a:t>
             </a:fld>
             <a:endParaRPr lang="en-US"/>
           </a:p>
@@ -26530,6 +26585,13 @@
             <a:schemeClr val="lt1"/>
           </a:fontRef>
         </p:style>
+        <p:txBody>
+          <a:bodyPr/>
+          <a:lstStyle/>
+          <a:p>
+            <a:endParaRPr lang="en-IN"/>
+          </a:p>
+        </p:txBody>
       </p:sp>
       <p:sp>
         <p:nvSpPr>
@@ -26568,6 +26630,13 @@
             <a:schemeClr val="lt1"/>
           </a:fontRef>
         </p:style>
+        <p:txBody>
+          <a:bodyPr/>
+          <a:lstStyle/>
+          <a:p>
+            <a:endParaRPr lang="en-IN"/>
+          </a:p>
+        </p:txBody>
       </p:sp>
       <p:sp>
         <p:nvSpPr>
@@ -26586,7 +26655,7 @@
           <a:p>
             <a:fld id="{5BCAD085-E8A6-8845-BD4E-CB4CCA059FC4}" type="datetimeFigureOut">
               <a:rPr lang="en-US" smtClean="0"/>
-              <a:t>7/7/2026</a:t>
+              <a:t>7/15/2026</a:t>
             </a:fld>
             <a:endParaRPr lang="en-US"/>
           </a:p>
@@ -26940,7 +27009,7 @@
           <a:p>
             <a:fld id="{5BCAD085-E8A6-8845-BD4E-CB4CCA059FC4}" type="datetimeFigureOut">
               <a:rPr lang="en-US" smtClean="0"/>
-              <a:t>7/7/2026</a:t>
+              <a:t>7/15/2026</a:t>
             </a:fld>
             <a:endParaRPr lang="en-US"/>
           </a:p>
@@ -27322,7 +27391,7 @@
           <a:p>
             <a:fld id="{5BCAD085-E8A6-8845-BD4E-CB4CCA059FC4}" type="datetimeFigureOut">
               <a:rPr lang="en-US" smtClean="0"/>
-              <a:t>7/7/2026</a:t>
+              <a:t>7/15/2026</a:t>
             </a:fld>
             <a:endParaRPr lang="en-US"/>
           </a:p>
@@ -27442,6 +27511,13 @@
             <a:schemeClr val="lt1"/>
           </a:fontRef>
         </p:style>
+        <p:txBody>
+          <a:bodyPr/>
+          <a:lstStyle/>
+          <a:p>
+            <a:endParaRPr lang="en-IN"/>
+          </a:p>
+        </p:txBody>
       </p:sp>
       <p:sp>
         <p:nvSpPr>
@@ -27480,6 +27556,13 @@
             <a:schemeClr val="lt1"/>
           </a:fontRef>
         </p:style>
+        <p:txBody>
+          <a:bodyPr/>
+          <a:lstStyle/>
+          <a:p>
+            <a:endParaRPr lang="en-IN"/>
+          </a:p>
+        </p:txBody>
       </p:sp>
       <p:sp>
         <p:nvSpPr>
@@ -27609,7 +27692,7 @@
           <a:p>
             <a:fld id="{5BCAD085-E8A6-8845-BD4E-CB4CCA059FC4}" type="datetimeFigureOut">
               <a:rPr lang="en-US" smtClean="0"/>
-              <a:t>7/7/2026</a:t>
+              <a:t>7/15/2026</a:t>
             </a:fld>
             <a:endParaRPr lang="en-US"/>
           </a:p>
@@ -30466,7 +30549,7 @@
           <p:nvPr>
             <p:extLst>
               <p:ext uri="{D42A27DB-BD31-4B8C-83A1-F6EECF244321}">
-                <p14:modId xmlns:p14="http://schemas.microsoft.com/office/powerpoint/2010/main" val="1919849202"/>
+                <p14:modId xmlns:p14="http://schemas.microsoft.com/office/powerpoint/2010/main" val="2540787410"/>
               </p:ext>
             </p:extLst>
           </p:nvPr>
